--- a/assets/logo.pptx
+++ b/assets/logo.pptx
@@ -3358,143 +3358,122 @@
           </a:prstGeom>
         </p:spPr>
       </p:pic>
-      <p:grpSp>
-        <p:nvGrpSpPr>
-          <p:cNvPr id="10" name="그룹 9">
-            <a:extLst>
-              <a:ext uri="{FF2B5EF4-FFF2-40B4-BE49-F238E27FC236}">
-                <a16:creationId xmlns:a16="http://schemas.microsoft.com/office/drawing/2014/main" id="{819FF8D3-5B35-EBE9-BE0F-AE1FF8D692A3}"/>
-              </a:ext>
-            </a:extLst>
-          </p:cNvPr>
-          <p:cNvGrpSpPr/>
+      <p:sp>
+        <p:nvSpPr>
+          <p:cNvPr id="4" name="TextBox 3">
+            <a:extLst>
+              <a:ext uri="{FF2B5EF4-FFF2-40B4-BE49-F238E27FC236}">
+                <a16:creationId xmlns:a16="http://schemas.microsoft.com/office/drawing/2014/main" id="{4D5192ED-8106-2701-F5B3-FC340768B27D}"/>
+              </a:ext>
+            </a:extLst>
+          </p:cNvPr>
+          <p:cNvSpPr txBox="1"/>
           <p:nvPr/>
-        </p:nvGrpSpPr>
-        <p:grpSpPr>
+        </p:nvSpPr>
+        <p:spPr>
           <a:xfrm>
             <a:off x="4843679" y="2391780"/>
-            <a:ext cx="4522406" cy="1686893"/>
-            <a:chOff x="4806608" y="2391780"/>
-            <a:chExt cx="4522406" cy="1686893"/>
+            <a:ext cx="4522406" cy="1323439"/>
           </a:xfrm>
-        </p:grpSpPr>
-        <p:sp>
-          <p:nvSpPr>
-            <p:cNvPr id="4" name="TextBox 3">
-              <a:extLst>
-                <a:ext uri="{FF2B5EF4-FFF2-40B4-BE49-F238E27FC236}">
-                  <a16:creationId xmlns:a16="http://schemas.microsoft.com/office/drawing/2014/main" id="{4D5192ED-8106-2701-F5B3-FC340768B27D}"/>
-                </a:ext>
-              </a:extLst>
-            </p:cNvPr>
-            <p:cNvSpPr txBox="1"/>
-            <p:nvPr/>
-          </p:nvSpPr>
-          <p:spPr>
-            <a:xfrm>
-              <a:off x="4806608" y="2391780"/>
-              <a:ext cx="4522406" cy="1323439"/>
-            </a:xfrm>
-            <a:prstGeom prst="rect">
-              <a:avLst/>
-            </a:prstGeom>
-            <a:noFill/>
-          </p:spPr>
-          <p:txBody>
-            <a:bodyPr wrap="square" lIns="0" rIns="0" rtlCol="0" anchor="ctr" anchorCtr="0">
-              <a:spAutoFit/>
-            </a:bodyPr>
-            <a:lstStyle/>
-            <a:p>
-              <a:r>
-                <a:rPr kumimoji="1" lang="en-US" altLang="ko-KR" sz="8000" b="1" dirty="0">
-                  <a:latin typeface="Manrope" pitchFamily="2" charset="0"/>
-                </a:rPr>
-                <a:t>NEST </a:t>
-              </a:r>
-              <a:r>
-                <a:rPr kumimoji="1" lang="en-US" altLang="ko-KR" sz="8000" dirty="0">
-                  <a:latin typeface="Manrope" pitchFamily="2" charset="0"/>
-                </a:rPr>
-                <a:t>Lab</a:t>
-              </a:r>
-              <a:endParaRPr kumimoji="1" lang="ko-KR" altLang="en-US" sz="8000" dirty="0">
+          <a:prstGeom prst="rect">
+            <a:avLst/>
+          </a:prstGeom>
+          <a:noFill/>
+        </p:spPr>
+        <p:txBody>
+          <a:bodyPr wrap="square" lIns="0" rIns="0" rtlCol="0" anchor="ctr" anchorCtr="0">
+            <a:spAutoFit/>
+          </a:bodyPr>
+          <a:lstStyle/>
+          <a:p>
+            <a:r>
+              <a:rPr kumimoji="1" lang="en-US" altLang="ko-KR" sz="8000" b="1" dirty="0">
                 <a:latin typeface="Manrope" pitchFamily="2" charset="0"/>
-              </a:endParaRPr>
-            </a:p>
-          </p:txBody>
-        </p:sp>
-        <p:sp>
-          <p:nvSpPr>
-            <p:cNvPr id="7" name="TextBox 6">
-              <a:extLst>
-                <a:ext uri="{FF2B5EF4-FFF2-40B4-BE49-F238E27FC236}">
-                  <a16:creationId xmlns:a16="http://schemas.microsoft.com/office/drawing/2014/main" id="{FB41C775-B948-B9E4-909F-8297434C7BB4}"/>
-                </a:ext>
-              </a:extLst>
-            </p:cNvPr>
-            <p:cNvSpPr txBox="1"/>
-            <p:nvPr/>
-          </p:nvSpPr>
-          <p:spPr>
-            <a:xfrm>
-              <a:off x="4856373" y="3463120"/>
-              <a:ext cx="4472641" cy="615553"/>
-            </a:xfrm>
-            <a:prstGeom prst="rect">
-              <a:avLst/>
-            </a:prstGeom>
-            <a:noFill/>
-          </p:spPr>
-          <p:txBody>
-            <a:bodyPr wrap="square" lIns="0" rIns="0" rtlCol="0" anchor="ctr" anchorCtr="0">
-              <a:spAutoFit/>
-            </a:bodyPr>
-            <a:lstStyle/>
-            <a:p>
-              <a:r>
-                <a:rPr kumimoji="1" lang="en-US" altLang="ko-KR" sz="3400" b="1" dirty="0">
-                  <a:latin typeface="Manrope" pitchFamily="2" charset="0"/>
-                </a:rPr>
-                <a:t>Ne</a:t>
-              </a:r>
-              <a:r>
-                <a:rPr kumimoji="1" lang="en-US" altLang="ko-KR" sz="3400" dirty="0">
-                  <a:latin typeface="Manrope" pitchFamily="2" charset="0"/>
-                </a:rPr>
-                <a:t>twork and </a:t>
-              </a:r>
-              <a:r>
-                <a:rPr kumimoji="1" lang="en-US" altLang="ko-KR" sz="3400" b="1" dirty="0">
-                  <a:latin typeface="Manrope" pitchFamily="2" charset="0"/>
-                </a:rPr>
-                <a:t>S</a:t>
-              </a:r>
-              <a:r>
-                <a:rPr kumimoji="1" lang="en-US" altLang="ko-KR" sz="3400" dirty="0">
-                  <a:latin typeface="Manrope" pitchFamily="2" charset="0"/>
-                </a:rPr>
-                <a:t>ecuri</a:t>
-              </a:r>
-              <a:r>
-                <a:rPr kumimoji="1" lang="en-US" altLang="ko-KR" sz="3400" b="1" dirty="0">
-                  <a:latin typeface="Manrope" pitchFamily="2" charset="0"/>
-                </a:rPr>
-                <a:t>t</a:t>
-              </a:r>
-              <a:r>
-                <a:rPr kumimoji="1" lang="en-US" altLang="ko-KR" sz="3400" dirty="0">
-                  <a:latin typeface="Manrope" pitchFamily="2" charset="0"/>
-                </a:rPr>
-                <a:t>y</a:t>
-              </a:r>
-              <a:endParaRPr kumimoji="1" lang="ko-KR" altLang="en-US" sz="3400" dirty="0">
+              </a:rPr>
+              <a:t>NEST </a:t>
+            </a:r>
+            <a:r>
+              <a:rPr kumimoji="1" lang="en-US" altLang="ko-KR" sz="8000" dirty="0">
                 <a:latin typeface="Manrope" pitchFamily="2" charset="0"/>
-              </a:endParaRPr>
-            </a:p>
-          </p:txBody>
-        </p:sp>
-      </p:grpSp>
+              </a:rPr>
+              <a:t>Lab</a:t>
+            </a:r>
+            <a:endParaRPr kumimoji="1" lang="ko-KR" altLang="en-US" sz="8000" dirty="0">
+              <a:latin typeface="Manrope" pitchFamily="2" charset="0"/>
+            </a:endParaRPr>
+          </a:p>
+        </p:txBody>
+      </p:sp>
+      <p:sp>
+        <p:nvSpPr>
+          <p:cNvPr id="7" name="TextBox 6">
+            <a:extLst>
+              <a:ext uri="{FF2B5EF4-FFF2-40B4-BE49-F238E27FC236}">
+                <a16:creationId xmlns:a16="http://schemas.microsoft.com/office/drawing/2014/main" id="{FB41C775-B948-B9E4-909F-8297434C7BB4}"/>
+              </a:ext>
+            </a:extLst>
+          </p:cNvPr>
+          <p:cNvSpPr txBox="1"/>
+          <p:nvPr/>
+        </p:nvSpPr>
+        <p:spPr>
+          <a:xfrm>
+            <a:off x="4893444" y="3463120"/>
+            <a:ext cx="4472641" cy="615553"/>
+          </a:xfrm>
+          <a:prstGeom prst="rect">
+            <a:avLst/>
+          </a:prstGeom>
+          <a:noFill/>
+        </p:spPr>
+        <p:txBody>
+          <a:bodyPr wrap="square" lIns="0" rIns="0" rtlCol="0" anchor="ctr" anchorCtr="0">
+            <a:spAutoFit/>
+          </a:bodyPr>
+          <a:lstStyle/>
+          <a:p>
+            <a:r>
+              <a:rPr kumimoji="1" lang="en-US" altLang="ko-KR" sz="3400" b="1" dirty="0">
+                <a:latin typeface="Manrope" pitchFamily="2" charset="0"/>
+              </a:rPr>
+              <a:t>Ne</a:t>
+            </a:r>
+            <a:r>
+              <a:rPr kumimoji="1" lang="en-US" altLang="ko-KR" sz="3400" dirty="0">
+                <a:latin typeface="Manrope" pitchFamily="2" charset="0"/>
+              </a:rPr>
+              <a:t>twork and </a:t>
+            </a:r>
+            <a:r>
+              <a:rPr kumimoji="1" lang="en-US" altLang="ko-KR" sz="3400" b="1" dirty="0">
+                <a:latin typeface="Manrope" pitchFamily="2" charset="0"/>
+              </a:rPr>
+              <a:t>S</a:t>
+            </a:r>
+            <a:r>
+              <a:rPr kumimoji="1" lang="en-US" altLang="ko-KR" sz="3400" dirty="0">
+                <a:latin typeface="Manrope" pitchFamily="2" charset="0"/>
+              </a:rPr>
+              <a:t>ecuri</a:t>
+            </a:r>
+            <a:r>
+              <a:rPr kumimoji="1" lang="en-US" altLang="ko-KR" sz="3400" b="1" dirty="0">
+                <a:latin typeface="Manrope" pitchFamily="2" charset="0"/>
+              </a:rPr>
+              <a:t>t</a:t>
+            </a:r>
+            <a:r>
+              <a:rPr kumimoji="1" lang="en-US" altLang="ko-KR" sz="3400" dirty="0">
+                <a:latin typeface="Manrope" pitchFamily="2" charset="0"/>
+              </a:rPr>
+              <a:t>y</a:t>
+            </a:r>
+            <a:endParaRPr kumimoji="1" lang="ko-KR" altLang="en-US" sz="3400" dirty="0">
+              <a:latin typeface="Manrope" pitchFamily="2" charset="0"/>
+            </a:endParaRPr>
+          </a:p>
+        </p:txBody>
+      </p:sp>
     </p:spTree>
     <p:extLst>
       <p:ext uri="{BB962C8B-B14F-4D97-AF65-F5344CB8AC3E}">

--- a/assets/logo.pptx
+++ b/assets/logo.pptx
@@ -105,6 +105,11 @@
       </a:defRPr>
     </a:lvl9pPr>
   </p:defaultTextStyle>
+  <p:extLst>
+    <p:ext uri="{EFAFB233-063F-42B5-8137-9DF3F51BA10A}">
+      <p15:sldGuideLst xmlns:p15="http://schemas.microsoft.com/office/powerpoint/2012/main"/>
+    </p:ext>
+  </p:extLst>
 </p:presentation>
 </file>
 
@@ -3372,7 +3377,7 @@
         </p:nvSpPr>
         <p:spPr>
           <a:xfrm>
-            <a:off x="4843679" y="2391780"/>
+            <a:off x="4843679" y="2340199"/>
             <a:ext cx="4522406" cy="1323439"/>
           </a:xfrm>
           <a:prstGeom prst="rect">
@@ -3418,7 +3423,7 @@
         </p:nvSpPr>
         <p:spPr>
           <a:xfrm>
-            <a:off x="4893444" y="3463120"/>
+            <a:off x="4893444" y="3411539"/>
             <a:ext cx="4472641" cy="615553"/>
           </a:xfrm>
           <a:prstGeom prst="rect">
@@ -3560,7 +3565,7 @@
         </p:nvSpPr>
         <p:spPr>
           <a:xfrm>
-            <a:off x="4843679" y="2391780"/>
+            <a:off x="4843679" y="2426682"/>
             <a:ext cx="4522406" cy="1323439"/>
           </a:xfrm>
           <a:prstGeom prst="rect">
